--- a/3. Stimuli/OMIT Stimuli/OMIT Stim F.pptx
+++ b/3. Stimuli/OMIT Stimuli/OMIT Stim F.pptx
@@ -317,7 +317,7 @@
       </p15:sldGuideLst>
     </p:ext>
     <p:ext uri="GoogleSlidesCustomDataVersion2">
-      <go:slidesCustomData xmlns:go="http://customooxmlschemas.google.com/" r:id="rId59" roundtripDataSignature="AMtx7mi22h+gNtDpWIeafWXi5YFWH0fbsw=="/>
+      <go:slidesCustomData xmlns:go="http://customooxmlschemas.google.com/" r:id="rId59" roundtripDataSignature="AMtx7mjkTI64J/AAvlwS6mi6huLsHu6VrA=="/>
     </p:ext>
   </p:extLst>
 </p:presentation>
@@ -1677,20 +1677,26 @@
           <a:lstStyle/>
           <a:p>
             <a:pPr indent="0" lvl="0" marL="0" rtl="0" algn="l">
-              <a:lnSpc>
-                <a:spcPct val="100000"/>
-              </a:lnSpc>
-              <a:spcBef>
-                <a:spcPts val="0"/>
-              </a:spcBef>
-              <a:spcAft>
-                <a:spcPts val="0"/>
-              </a:spcAft>
+              <a:spcBef>
+                <a:spcPts val="0"/>
+              </a:spcBef>
+              <a:spcAft>
+                <a:spcPts val="0"/>
+              </a:spcAft>
+              <a:buClr>
+                <a:schemeClr val="dk1"/>
+              </a:buClr>
               <a:buSzPts val="1100"/>
+              <a:buFont typeface="Arial"/>
               <a:buNone/>
             </a:pPr>
             <a:r>
-              <a:t/>
+              <a:rPr lang="en">
+                <a:solidFill>
+                  <a:schemeClr val="dk1"/>
+                </a:solidFill>
+              </a:rPr>
+              <a:t>Which classmate did Kendall tell about feeling happy?</a:t>
             </a:r>
             <a:endParaRPr/>
           </a:p>
@@ -1794,20 +1800,26 @@
           <a:lstStyle/>
           <a:p>
             <a:pPr indent="0" lvl="0" marL="0" rtl="0" algn="l">
-              <a:lnSpc>
-                <a:spcPct val="100000"/>
-              </a:lnSpc>
-              <a:spcBef>
-                <a:spcPts val="0"/>
-              </a:spcBef>
-              <a:spcAft>
-                <a:spcPts val="0"/>
-              </a:spcAft>
+              <a:spcBef>
+                <a:spcPts val="0"/>
+              </a:spcBef>
+              <a:spcAft>
+                <a:spcPts val="0"/>
+              </a:spcAft>
+              <a:buClr>
+                <a:schemeClr val="dk1"/>
+              </a:buClr>
               <a:buSzPts val="1100"/>
+              <a:buFont typeface="Arial"/>
               <a:buNone/>
             </a:pPr>
             <a:r>
-              <a:t/>
+              <a:rPr lang="en">
+                <a:solidFill>
+                  <a:schemeClr val="dk1"/>
+                </a:solidFill>
+              </a:rPr>
+              <a:t>Which classmate did Kendall tell about elephants?</a:t>
             </a:r>
             <a:endParaRPr/>
           </a:p>
@@ -3269,7 +3281,7 @@
       </p:grpSpPr>
       <p:sp>
         <p:nvSpPr>
-          <p:cNvPr id="346" name="Google Shape;346;p22:notes"/>
+          <p:cNvPr id="346" name="Google Shape;346;p23:notes"/>
           <p:cNvSpPr/>
           <p:nvPr>
             <p:ph idx="2" type="sldImg"/>
@@ -3314,7 +3326,7 @@
       </p:sp>
       <p:sp>
         <p:nvSpPr>
-          <p:cNvPr id="347" name="Google Shape;347;p22:notes"/>
+          <p:cNvPr id="347" name="Google Shape;347;p23:notes"/>
           <p:cNvSpPr txBox="1"/>
           <p:nvPr>
             <p:ph idx="1" type="body"/>
@@ -3362,7 +3374,15 @@
                   <a:schemeClr val="dk1"/>
                 </a:solidFill>
               </a:rPr>
-              <a:t>After the playground, Kendall saw his mom in the park! Kendall’s mom said “Hey Kendall how was school today?” Do you think Kendall should tell his mom about the elephants or about feeling happy today?</a:t>
+              <a:t>After the playground, </a:t>
+            </a:r>
+            <a:r>
+              <a:rPr lang="en">
+                <a:solidFill>
+                  <a:schemeClr val="dk1"/>
+                </a:solidFill>
+              </a:rPr>
+              <a:t> Kendall saw his friend’s mom and she said “Hey Kendall! How was school today?” Do you think Kendall should tell her about the elephants or that he’s feeling happy today?</a:t>
             </a:r>
             <a:endParaRPr/>
           </a:p>
@@ -3395,7 +3415,7 @@
       </p:grpSpPr>
       <p:sp>
         <p:nvSpPr>
-          <p:cNvPr id="358" name="Google Shape;358;p23:notes"/>
+          <p:cNvPr id="358" name="Google Shape;358;p22:notes"/>
           <p:cNvSpPr/>
           <p:nvPr>
             <p:ph idx="2" type="sldImg"/>
@@ -3440,7 +3460,7 @@
       </p:sp>
       <p:sp>
         <p:nvSpPr>
-          <p:cNvPr id="359" name="Google Shape;359;p23:notes"/>
+          <p:cNvPr id="359" name="Google Shape;359;p22:notes"/>
           <p:cNvSpPr txBox="1"/>
           <p:nvPr>
             <p:ph idx="1" type="body"/>
@@ -3488,7 +3508,15 @@
                   <a:schemeClr val="dk1"/>
                 </a:solidFill>
               </a:rPr>
-              <a:t>Then Kendall saw his friend’s mom and she said “Hey Kendall! How was school today?” Do you think Kendall should tell her about the elephants or that he’s feeling happy today?</a:t>
+              <a:t>Then </a:t>
+            </a:r>
+            <a:r>
+              <a:rPr lang="en">
+                <a:solidFill>
+                  <a:schemeClr val="dk1"/>
+                </a:solidFill>
+              </a:rPr>
+              <a:t>Kendall saw his mom in the park! Kendall’s mom said “Hey Kendall how was school today?” Do you think Kendall should tell his mom about the elephants or about feeling happy today?</a:t>
             </a:r>
             <a:endParaRPr/>
           </a:p>
@@ -6550,7 +6578,7 @@
       </p:grpSpPr>
       <p:sp>
         <p:nvSpPr>
-          <p:cNvPr id="529" name="Google Shape;529;p40:notes"/>
+          <p:cNvPr id="529" name="Google Shape;529;p41:notes"/>
           <p:cNvSpPr/>
           <p:nvPr>
             <p:ph idx="2" type="sldImg"/>
@@ -6595,7 +6623,7 @@
       </p:sp>
       <p:sp>
         <p:nvSpPr>
-          <p:cNvPr id="530" name="Google Shape;530;p40:notes"/>
+          <p:cNvPr id="530" name="Google Shape;530;p41:notes"/>
           <p:cNvSpPr txBox="1"/>
           <p:nvPr>
             <p:ph idx="1" type="body"/>
@@ -6634,8 +6662,20 @@
               <a:buNone/>
             </a:pPr>
             <a:r>
+              <a:rPr lang="en">
+                <a:solidFill>
+                  <a:schemeClr val="dk1"/>
+                </a:solidFill>
+              </a:rPr>
+              <a:t>After the playground,</a:t>
+            </a:r>
+            <a:r>
               <a:rPr lang="en"/>
-              <a:t>After the playground, Percy saw his mom in the park! Percy’s mom said “Hey Percy how was school today?” Do you think Percy should tell his mom about the foxes or about feeling sad today?</a:t>
+              <a:t> </a:t>
+            </a:r>
+            <a:r>
+              <a:rPr lang="en"/>
+              <a:t>Percy saw his friend’s mom and she said “Hey Percy! How was school today?” Do you think Percy should tell her about the foxes or that he’s feeling sad?</a:t>
             </a:r>
             <a:endParaRPr/>
           </a:p>
@@ -6668,7 +6708,7 @@
       </p:grpSpPr>
       <p:sp>
         <p:nvSpPr>
-          <p:cNvPr id="541" name="Google Shape;541;p41:notes"/>
+          <p:cNvPr id="541" name="Google Shape;541;p40:notes"/>
           <p:cNvSpPr/>
           <p:nvPr>
             <p:ph idx="2" type="sldImg"/>
@@ -6713,7 +6753,7 @@
       </p:sp>
       <p:sp>
         <p:nvSpPr>
-          <p:cNvPr id="542" name="Google Shape;542;p41:notes"/>
+          <p:cNvPr id="542" name="Google Shape;542;p40:notes"/>
           <p:cNvSpPr txBox="1"/>
           <p:nvPr>
             <p:ph idx="1" type="body"/>
@@ -6753,7 +6793,7 @@
             </a:pPr>
             <a:r>
               <a:rPr lang="en"/>
-              <a:t>Then Percy saw his friend’s mom and she said “Hey Percy! How was school today?” Do you think Percy should tell her about the foxes or that he’s feeling sad?</a:t>
+              <a:t>Then Percy saw his mom in the park! Percy’s mom said “Hey Percy how was school today?” Do you think Percy should tell his mom about the foxes or about feeling sad today?</a:t>
             </a:r>
             <a:endParaRPr/>
           </a:p>
@@ -7924,7 +7964,7 @@
             </a:pPr>
             <a:r>
               <a:rPr lang="en"/>
-              <a:t>And Kendall is still feeling happy today after learning about elephants.</a:t>
+              <a:t>And Kendall is still feeling happy today, even after learning an interesting fact about elephants.</a:t>
             </a:r>
             <a:endParaRPr b="1"/>
           </a:p>
@@ -32238,7 +32278,7 @@
         </p:blipFill>
         <p:spPr>
           <a:xfrm>
-            <a:off x="4604152" y="2391048"/>
+            <a:off x="4748202" y="2413073"/>
             <a:ext cx="1437410" cy="1755556"/>
           </a:xfrm>
           <a:prstGeom prst="rect">
@@ -32680,7 +32720,7 @@
         </p:blipFill>
         <p:spPr>
           <a:xfrm>
-            <a:off x="4257465" y="2346673"/>
+            <a:off x="4742090" y="2412748"/>
             <a:ext cx="1437410" cy="1755556"/>
           </a:xfrm>
           <a:prstGeom prst="rect">
@@ -36496,7 +36536,7 @@
       </p:grpSpPr>
       <p:pic>
         <p:nvPicPr>
-          <p:cNvPr descr="A cartoon of a white and purple animal&#10;&#10;Description automatically generated" id="349" name="Google Shape;349;p22"/>
+          <p:cNvPr descr="A cartoon of a white and purple animal&#10;&#10;Description automatically generated" id="349" name="Google Shape;349;p23"/>
           <p:cNvPicPr preferRelativeResize="0"/>
           <p:nvPr/>
         </p:nvPicPr>
@@ -36504,12 +36544,12 @@
           <a:blip r:embed="rId3">
             <a:alphaModFix/>
           </a:blip>
-          <a:srcRect b="0" l="10179" r="-10179" t="0"/>
+          <a:srcRect b="0" l="10180" r="-10180" t="0"/>
           <a:stretch/>
         </p:blipFill>
         <p:spPr>
           <a:xfrm>
-            <a:off x="2432641" y="2222798"/>
+            <a:off x="2353816" y="2234048"/>
             <a:ext cx="1437410" cy="1755556"/>
           </a:xfrm>
           <a:prstGeom prst="rect">
@@ -36523,12 +36563,12 @@
       </p:pic>
       <p:pic>
         <p:nvPicPr>
-          <p:cNvPr descr="A cartoon of a white and purple animal&#10;&#10;Description automatically generated" id="350" name="Google Shape;350;p22"/>
+          <p:cNvPr descr="A cartoon of a white and purple animal&#10;&#10;Description automatically generated" id="350" name="Google Shape;350;p23"/>
           <p:cNvPicPr preferRelativeResize="0"/>
           <p:nvPr/>
         </p:nvPicPr>
         <p:blipFill rotWithShape="1">
-          <a:blip r:embed="rId3">
+          <a:blip r:embed="rId4">
             <a:alphaModFix/>
           </a:blip>
           <a:srcRect b="2250" l="0" r="0" t="-2250"/>
@@ -36550,12 +36590,12 @@
       </p:pic>
       <p:pic>
         <p:nvPicPr>
-          <p:cNvPr descr="Small Trees | Free SVG" id="351" name="Google Shape;351;p22"/>
+          <p:cNvPr descr="Small Trees | Free SVG" id="351" name="Google Shape;351;p23"/>
           <p:cNvPicPr preferRelativeResize="0"/>
           <p:nvPr/>
         </p:nvPicPr>
         <p:blipFill rotWithShape="1">
-          <a:blip r:embed="rId4">
+          <a:blip r:embed="rId5">
             <a:alphaModFix/>
           </a:blip>
           <a:srcRect b="0" l="0" r="0" t="0"/>
@@ -36563,7 +36603,7 @@
         </p:blipFill>
         <p:spPr>
           <a:xfrm>
-            <a:off x="78150" y="304800"/>
+            <a:off x="100675" y="259775"/>
             <a:ext cx="2044400" cy="2044400"/>
           </a:xfrm>
           <a:prstGeom prst="rect">
@@ -36577,12 +36617,12 @@
       </p:pic>
       <p:pic>
         <p:nvPicPr>
-          <p:cNvPr descr="Small Trees | Free SVG" id="352" name="Google Shape;352;p22"/>
+          <p:cNvPr descr="Small Trees | Free SVG" id="352" name="Google Shape;352;p23"/>
           <p:cNvPicPr preferRelativeResize="0"/>
           <p:nvPr/>
         </p:nvPicPr>
         <p:blipFill rotWithShape="1">
-          <a:blip r:embed="rId4">
+          <a:blip r:embed="rId5">
             <a:alphaModFix/>
           </a:blip>
           <a:srcRect b="0" l="0" r="0" t="0"/>
@@ -36590,7 +36630,7 @@
         </p:blipFill>
         <p:spPr>
           <a:xfrm>
-            <a:off x="6716925" y="304800"/>
+            <a:off x="6998250" y="389650"/>
             <a:ext cx="2044399" cy="2044400"/>
           </a:xfrm>
           <a:prstGeom prst="rect">
@@ -36604,14 +36644,14 @@
       </p:pic>
       <p:sp>
         <p:nvSpPr>
-          <p:cNvPr id="353" name="Google Shape;353;p22"/>
+          <p:cNvPr id="353" name="Google Shape;353;p23"/>
           <p:cNvSpPr/>
           <p:nvPr/>
         </p:nvSpPr>
         <p:spPr>
           <a:xfrm>
-            <a:off x="3096100" y="1671225"/>
-            <a:ext cx="1174767" cy="832950"/>
+            <a:off x="2893375" y="1648700"/>
+            <a:ext cx="1193450" cy="832950"/>
           </a:xfrm>
           <a:prstGeom prst="wedgeRoundRectCallout">
             <a:avLst>
@@ -36673,13 +36713,13 @@
       </p:sp>
       <p:sp>
         <p:nvSpPr>
-          <p:cNvPr id="354" name="Google Shape;354;p22"/>
+          <p:cNvPr id="354" name="Google Shape;354;p23"/>
           <p:cNvSpPr/>
           <p:nvPr/>
         </p:nvSpPr>
         <p:spPr>
           <a:xfrm flipH="1">
-            <a:off x="1732600" y="1671225"/>
+            <a:off x="1529900" y="1648700"/>
             <a:ext cx="1305300" cy="812700"/>
           </a:xfrm>
           <a:prstGeom prst="wedgeRoundRectCallout">
@@ -36742,12 +36782,12 @@
       </p:sp>
       <p:pic>
         <p:nvPicPr>
-          <p:cNvPr descr="Elephant | Free Stock Photo | Illustration of an elephant | # 11454" id="355" name="Google Shape;355;p22"/>
+          <p:cNvPr descr="Elephant | Free Stock Photo | Illustration of an elephant | # 11454" id="355" name="Google Shape;355;p23"/>
           <p:cNvPicPr preferRelativeResize="0"/>
           <p:nvPr/>
         </p:nvPicPr>
         <p:blipFill rotWithShape="1">
-          <a:blip r:embed="rId5">
+          <a:blip r:embed="rId6">
             <a:alphaModFix/>
           </a:blip>
           <a:srcRect b="0" l="0" r="0" t="0"/>
@@ -36755,7 +36795,7 @@
         </p:blipFill>
         <p:spPr>
           <a:xfrm>
-            <a:off x="3259075" y="1722838"/>
+            <a:off x="2968991" y="1689963"/>
             <a:ext cx="917249" cy="709482"/>
           </a:xfrm>
           <a:prstGeom prst="rect">
@@ -36769,12 +36809,12 @@
       </p:pic>
       <p:pic>
         <p:nvPicPr>
-          <p:cNvPr id="356" name="Google Shape;356;p22"/>
+          <p:cNvPr id="356" name="Google Shape;356;p23"/>
           <p:cNvPicPr preferRelativeResize="0"/>
           <p:nvPr/>
         </p:nvPicPr>
         <p:blipFill rotWithShape="1">
-          <a:blip r:embed="rId6">
+          <a:blip r:embed="rId7">
             <a:alphaModFix/>
           </a:blip>
           <a:srcRect b="0" l="0" r="0" t="0"/>
@@ -36782,7 +36822,7 @@
         </p:blipFill>
         <p:spPr>
           <a:xfrm>
-            <a:off x="2031825" y="1712500"/>
+            <a:off x="1829125" y="1689963"/>
             <a:ext cx="706850" cy="730174"/>
           </a:xfrm>
           <a:prstGeom prst="rect">
@@ -36845,7 +36885,7 @@
                                     </p:set>
                                     <p:anim calcmode="lin" valueType="num">
                                       <p:cBhvr additive="base">
-                                        <p:cTn dur="1500"/>
+                                        <p:cTn dur="1600"/>
                                         <p:tgtEl>
                                           <p:spTgt spid="350"/>
                                         </p:tgtEl>
@@ -37099,7 +37139,7 @@
       </p:grpSpPr>
       <p:pic>
         <p:nvPicPr>
-          <p:cNvPr descr="A cartoon of a white and purple animal&#10;&#10;Description automatically generated" id="361" name="Google Shape;361;p23"/>
+          <p:cNvPr descr="A cartoon of a white and purple animal&#10;&#10;Description automatically generated" id="361" name="Google Shape;361;p22"/>
           <p:cNvPicPr preferRelativeResize="0"/>
           <p:nvPr/>
         </p:nvPicPr>
@@ -37107,12 +37147,12 @@
           <a:blip r:embed="rId3">
             <a:alphaModFix/>
           </a:blip>
-          <a:srcRect b="0" l="10179" r="-10179" t="0"/>
+          <a:srcRect b="0" l="10180" r="-10180" t="0"/>
           <a:stretch/>
         </p:blipFill>
         <p:spPr>
           <a:xfrm>
-            <a:off x="2353816" y="2234048"/>
+            <a:off x="2432641" y="2222798"/>
             <a:ext cx="1437410" cy="1755556"/>
           </a:xfrm>
           <a:prstGeom prst="rect">
@@ -37126,12 +37166,12 @@
       </p:pic>
       <p:pic>
         <p:nvPicPr>
-          <p:cNvPr descr="A cartoon of a white and purple animal&#10;&#10;Description automatically generated" id="362" name="Google Shape;362;p23"/>
+          <p:cNvPr descr="A cartoon of a white and purple animal&#10;&#10;Description automatically generated" id="362" name="Google Shape;362;p22"/>
           <p:cNvPicPr preferRelativeResize="0"/>
           <p:nvPr/>
         </p:nvPicPr>
         <p:blipFill rotWithShape="1">
-          <a:blip r:embed="rId4">
+          <a:blip r:embed="rId3">
             <a:alphaModFix/>
           </a:blip>
           <a:srcRect b="2250" l="0" r="0" t="-2250"/>
@@ -37153,12 +37193,12 @@
       </p:pic>
       <p:pic>
         <p:nvPicPr>
-          <p:cNvPr descr="Small Trees | Free SVG" id="363" name="Google Shape;363;p23"/>
+          <p:cNvPr descr="Small Trees | Free SVG" id="363" name="Google Shape;363;p22"/>
           <p:cNvPicPr preferRelativeResize="0"/>
           <p:nvPr/>
         </p:nvPicPr>
         <p:blipFill rotWithShape="1">
-          <a:blip r:embed="rId5">
+          <a:blip r:embed="rId4">
             <a:alphaModFix/>
           </a:blip>
           <a:srcRect b="0" l="0" r="0" t="0"/>
@@ -37166,7 +37206,7 @@
         </p:blipFill>
         <p:spPr>
           <a:xfrm>
-            <a:off x="100675" y="259775"/>
+            <a:off x="78150" y="304800"/>
             <a:ext cx="2044400" cy="2044400"/>
           </a:xfrm>
           <a:prstGeom prst="rect">
@@ -37180,12 +37220,12 @@
       </p:pic>
       <p:pic>
         <p:nvPicPr>
-          <p:cNvPr descr="Small Trees | Free SVG" id="364" name="Google Shape;364;p23"/>
+          <p:cNvPr descr="Small Trees | Free SVG" id="364" name="Google Shape;364;p22"/>
           <p:cNvPicPr preferRelativeResize="0"/>
           <p:nvPr/>
         </p:nvPicPr>
         <p:blipFill rotWithShape="1">
-          <a:blip r:embed="rId5">
+          <a:blip r:embed="rId4">
             <a:alphaModFix/>
           </a:blip>
           <a:srcRect b="0" l="0" r="0" t="0"/>
@@ -37193,7 +37233,7 @@
         </p:blipFill>
         <p:spPr>
           <a:xfrm>
-            <a:off x="6998250" y="389650"/>
+            <a:off x="6716925" y="304800"/>
             <a:ext cx="2044399" cy="2044400"/>
           </a:xfrm>
           <a:prstGeom prst="rect">
@@ -37207,14 +37247,14 @@
       </p:pic>
       <p:sp>
         <p:nvSpPr>
-          <p:cNvPr id="365" name="Google Shape;365;p23"/>
+          <p:cNvPr id="365" name="Google Shape;365;p22"/>
           <p:cNvSpPr/>
           <p:nvPr/>
         </p:nvSpPr>
         <p:spPr>
           <a:xfrm>
-            <a:off x="2893375" y="1648700"/>
-            <a:ext cx="1193450" cy="832950"/>
+            <a:off x="3096100" y="1671225"/>
+            <a:ext cx="1174767" cy="832950"/>
           </a:xfrm>
           <a:prstGeom prst="wedgeRoundRectCallout">
             <a:avLst>
@@ -37276,13 +37316,13 @@
       </p:sp>
       <p:sp>
         <p:nvSpPr>
-          <p:cNvPr id="366" name="Google Shape;366;p23"/>
+          <p:cNvPr id="366" name="Google Shape;366;p22"/>
           <p:cNvSpPr/>
           <p:nvPr/>
         </p:nvSpPr>
         <p:spPr>
           <a:xfrm flipH="1">
-            <a:off x="1529900" y="1648700"/>
+            <a:off x="1732600" y="1671225"/>
             <a:ext cx="1305300" cy="812700"/>
           </a:xfrm>
           <a:prstGeom prst="wedgeRoundRectCallout">
@@ -37345,12 +37385,12 @@
       </p:sp>
       <p:pic>
         <p:nvPicPr>
-          <p:cNvPr descr="Elephant | Free Stock Photo | Illustration of an elephant | # 11454" id="367" name="Google Shape;367;p23"/>
+          <p:cNvPr descr="Elephant | Free Stock Photo | Illustration of an elephant | # 11454" id="367" name="Google Shape;367;p22"/>
           <p:cNvPicPr preferRelativeResize="0"/>
           <p:nvPr/>
         </p:nvPicPr>
         <p:blipFill rotWithShape="1">
-          <a:blip r:embed="rId6">
+          <a:blip r:embed="rId5">
             <a:alphaModFix/>
           </a:blip>
           <a:srcRect b="0" l="0" r="0" t="0"/>
@@ -37358,7 +37398,7 @@
         </p:blipFill>
         <p:spPr>
           <a:xfrm>
-            <a:off x="2968991" y="1689963"/>
+            <a:off x="3259075" y="1722838"/>
             <a:ext cx="917249" cy="709482"/>
           </a:xfrm>
           <a:prstGeom prst="rect">
@@ -37372,12 +37412,12 @@
       </p:pic>
       <p:pic>
         <p:nvPicPr>
-          <p:cNvPr id="368" name="Google Shape;368;p23"/>
+          <p:cNvPr id="368" name="Google Shape;368;p22"/>
           <p:cNvPicPr preferRelativeResize="0"/>
           <p:nvPr/>
         </p:nvPicPr>
         <p:blipFill rotWithShape="1">
-          <a:blip r:embed="rId7">
+          <a:blip r:embed="rId6">
             <a:alphaModFix/>
           </a:blip>
           <a:srcRect b="0" l="0" r="0" t="0"/>
@@ -37385,7 +37425,7 @@
         </p:blipFill>
         <p:spPr>
           <a:xfrm>
-            <a:off x="1829125" y="1689963"/>
+            <a:off x="2031825" y="1712500"/>
             <a:ext cx="706850" cy="730174"/>
           </a:xfrm>
           <a:prstGeom prst="rect">
@@ -37448,7 +37488,7 @@
                                     </p:set>
                                     <p:anim calcmode="lin" valueType="num">
                                       <p:cBhvr additive="base">
-                                        <p:cTn dur="1600"/>
+                                        <p:cTn dur="1500"/>
                                         <p:tgtEl>
                                           <p:spTgt spid="362"/>
                                         </p:tgtEl>
@@ -38536,8 +38576,8 @@
         </p:blipFill>
         <p:spPr>
           <a:xfrm>
-            <a:off x="2187525" y="2989819"/>
-            <a:ext cx="1508018" cy="1755555"/>
+            <a:off x="2238300" y="3023344"/>
+            <a:ext cx="1508018" cy="1755556"/>
           </a:xfrm>
           <a:prstGeom prst="rect">
             <a:avLst/>
@@ -39238,8 +39278,8 @@
         </p:blipFill>
         <p:spPr>
           <a:xfrm>
-            <a:off x="2224708" y="3006799"/>
-            <a:ext cx="1500311" cy="1755556"/>
+            <a:off x="2246008" y="3028824"/>
+            <a:ext cx="1500310" cy="1755556"/>
           </a:xfrm>
           <a:prstGeom prst="rect">
             <a:avLst/>
@@ -44091,7 +44131,7 @@
       </p:grpSpPr>
       <p:pic>
         <p:nvPicPr>
-          <p:cNvPr descr="A cartoon of a white and purple animal&#10;&#10;Description automatically generated" id="532" name="Google Shape;532;p40"/>
+          <p:cNvPr descr="A cartoon of a white and purple animal&#10;&#10;Description automatically generated" id="532" name="Google Shape;532;p41"/>
           <p:cNvPicPr preferRelativeResize="0"/>
           <p:nvPr/>
         </p:nvPicPr>
@@ -44118,12 +44158,12 @@
       </p:pic>
       <p:pic>
         <p:nvPicPr>
-          <p:cNvPr descr="A cartoon of a white and purple animal&#10;&#10;Description automatically generated" id="533" name="Google Shape;533;p40"/>
+          <p:cNvPr descr="A cartoon of a white and purple animal&#10;&#10;Description automatically generated" id="533" name="Google Shape;533;p41"/>
           <p:cNvPicPr preferRelativeResize="0"/>
           <p:nvPr/>
         </p:nvPicPr>
         <p:blipFill rotWithShape="1">
-          <a:blip r:embed="rId3">
+          <a:blip r:embed="rId4">
             <a:alphaModFix/>
           </a:blip>
           <a:srcRect b="0" l="0" r="0" t="0"/>
@@ -44145,7 +44185,7 @@
       </p:pic>
       <p:sp>
         <p:nvSpPr>
-          <p:cNvPr id="534" name="Google Shape;534;p40"/>
+          <p:cNvPr id="534" name="Google Shape;534;p41"/>
           <p:cNvSpPr/>
           <p:nvPr/>
         </p:nvSpPr>
@@ -44214,14 +44254,14 @@
       </p:sp>
       <p:sp>
         <p:nvSpPr>
-          <p:cNvPr id="535" name="Google Shape;535;p40"/>
+          <p:cNvPr id="535" name="Google Shape;535;p41"/>
           <p:cNvSpPr/>
           <p:nvPr/>
         </p:nvSpPr>
         <p:spPr>
           <a:xfrm>
-            <a:off x="2927200" y="2349200"/>
-            <a:ext cx="1239851" cy="812700"/>
+            <a:off x="2927200" y="2349198"/>
+            <a:ext cx="1216250" cy="812701"/>
           </a:xfrm>
           <a:prstGeom prst="wedgeRoundRectCallout">
             <a:avLst>
@@ -44283,12 +44323,12 @@
       </p:sp>
       <p:pic>
         <p:nvPicPr>
-          <p:cNvPr id="536" name="Google Shape;536;p40"/>
+          <p:cNvPr id="536" name="Google Shape;536;p41"/>
           <p:cNvPicPr preferRelativeResize="0"/>
           <p:nvPr/>
         </p:nvPicPr>
         <p:blipFill rotWithShape="1">
-          <a:blip r:embed="rId4">
+          <a:blip r:embed="rId5">
             <a:alphaModFix/>
           </a:blip>
           <a:srcRect b="0" l="0" r="0" t="0"/>
@@ -44310,12 +44350,12 @@
       </p:pic>
       <p:pic>
         <p:nvPicPr>
-          <p:cNvPr id="537" name="Google Shape;537;p40" title="Cute fox | Free SVG"/>
+          <p:cNvPr id="537" name="Google Shape;537;p41" title="Cute fox | Free SVG"/>
           <p:cNvPicPr preferRelativeResize="0"/>
           <p:nvPr/>
         </p:nvPicPr>
         <p:blipFill rotWithShape="1">
-          <a:blip r:embed="rId5">
+          <a:blip r:embed="rId6">
             <a:alphaModFix/>
           </a:blip>
           <a:srcRect b="0" l="0" r="0" t="0"/>
@@ -44337,12 +44377,12 @@
       </p:pic>
       <p:pic>
         <p:nvPicPr>
-          <p:cNvPr descr="Small Trees | Free SVG" id="538" name="Google Shape;538;p40"/>
+          <p:cNvPr descr="Small Trees | Free SVG" id="538" name="Google Shape;538;p41"/>
           <p:cNvPicPr preferRelativeResize="0"/>
           <p:nvPr/>
         </p:nvPicPr>
         <p:blipFill rotWithShape="1">
-          <a:blip r:embed="rId6">
+          <a:blip r:embed="rId7">
             <a:alphaModFix/>
           </a:blip>
           <a:srcRect b="0" l="0" r="0" t="0"/>
@@ -44364,12 +44404,12 @@
       </p:pic>
       <p:pic>
         <p:nvPicPr>
-          <p:cNvPr descr="Small Trees | Free SVG" id="539" name="Google Shape;539;p40"/>
+          <p:cNvPr descr="Small Trees | Free SVG" id="539" name="Google Shape;539;p41"/>
           <p:cNvPicPr preferRelativeResize="0"/>
           <p:nvPr/>
         </p:nvPicPr>
         <p:blipFill rotWithShape="1">
-          <a:blip r:embed="rId6">
+          <a:blip r:embed="rId7">
             <a:alphaModFix/>
           </a:blip>
           <a:srcRect b="0" l="0" r="0" t="0"/>
@@ -44377,7 +44417,7 @@
         </p:blipFill>
         <p:spPr>
           <a:xfrm>
-            <a:off x="6784500" y="426900"/>
+            <a:off x="6435425" y="370575"/>
             <a:ext cx="2044399" cy="2044400"/>
           </a:xfrm>
           <a:prstGeom prst="rect">
@@ -44440,7 +44480,7 @@
                                     </p:set>
                                     <p:anim calcmode="lin" valueType="num">
                                       <p:cBhvr additive="base">
-                                        <p:cTn dur="2100"/>
+                                        <p:cTn dur="2200"/>
                                         <p:tgtEl>
                                           <p:spTgt spid="533"/>
                                         </p:tgtEl>
@@ -44694,7 +44734,7 @@
       </p:grpSpPr>
       <p:pic>
         <p:nvPicPr>
-          <p:cNvPr descr="A cartoon of a white and purple animal&#10;&#10;Description automatically generated" id="544" name="Google Shape;544;p41"/>
+          <p:cNvPr descr="A cartoon of a white and purple animal&#10;&#10;Description automatically generated" id="544" name="Google Shape;544;p40"/>
           <p:cNvPicPr preferRelativeResize="0"/>
           <p:nvPr/>
         </p:nvPicPr>
@@ -44721,12 +44761,12 @@
       </p:pic>
       <p:pic>
         <p:nvPicPr>
-          <p:cNvPr descr="A cartoon of a white and purple animal&#10;&#10;Description automatically generated" id="545" name="Google Shape;545;p41"/>
+          <p:cNvPr descr="A cartoon of a white and purple animal&#10;&#10;Description automatically generated" id="545" name="Google Shape;545;p40"/>
           <p:cNvPicPr preferRelativeResize="0"/>
           <p:nvPr/>
         </p:nvPicPr>
         <p:blipFill rotWithShape="1">
-          <a:blip r:embed="rId4">
+          <a:blip r:embed="rId3">
             <a:alphaModFix/>
           </a:blip>
           <a:srcRect b="0" l="0" r="0" t="0"/>
@@ -44748,7 +44788,7 @@
       </p:pic>
       <p:sp>
         <p:nvSpPr>
-          <p:cNvPr id="546" name="Google Shape;546;p41"/>
+          <p:cNvPr id="546" name="Google Shape;546;p40"/>
           <p:cNvSpPr/>
           <p:nvPr/>
         </p:nvSpPr>
@@ -44817,14 +44857,14 @@
       </p:sp>
       <p:sp>
         <p:nvSpPr>
-          <p:cNvPr id="547" name="Google Shape;547;p41"/>
+          <p:cNvPr id="547" name="Google Shape;547;p40"/>
           <p:cNvSpPr/>
           <p:nvPr/>
         </p:nvSpPr>
         <p:spPr>
           <a:xfrm>
-            <a:off x="2927200" y="2349198"/>
-            <a:ext cx="1216250" cy="812701"/>
+            <a:off x="2927200" y="2349200"/>
+            <a:ext cx="1239851" cy="812700"/>
           </a:xfrm>
           <a:prstGeom prst="wedgeRoundRectCallout">
             <a:avLst>
@@ -44886,12 +44926,12 @@
       </p:sp>
       <p:pic>
         <p:nvPicPr>
-          <p:cNvPr id="548" name="Google Shape;548;p41"/>
+          <p:cNvPr id="548" name="Google Shape;548;p40"/>
           <p:cNvPicPr preferRelativeResize="0"/>
           <p:nvPr/>
         </p:nvPicPr>
         <p:blipFill rotWithShape="1">
-          <a:blip r:embed="rId5">
+          <a:blip r:embed="rId4">
             <a:alphaModFix/>
           </a:blip>
           <a:srcRect b="0" l="0" r="0" t="0"/>
@@ -44913,12 +44953,12 @@
       </p:pic>
       <p:pic>
         <p:nvPicPr>
-          <p:cNvPr id="549" name="Google Shape;549;p41" title="Cute fox | Free SVG"/>
+          <p:cNvPr id="549" name="Google Shape;549;p40" title="Cute fox | Free SVG"/>
           <p:cNvPicPr preferRelativeResize="0"/>
           <p:nvPr/>
         </p:nvPicPr>
         <p:blipFill rotWithShape="1">
-          <a:blip r:embed="rId6">
+          <a:blip r:embed="rId5">
             <a:alphaModFix/>
           </a:blip>
           <a:srcRect b="0" l="0" r="0" t="0"/>
@@ -44940,12 +44980,12 @@
       </p:pic>
       <p:pic>
         <p:nvPicPr>
-          <p:cNvPr descr="Small Trees | Free SVG" id="550" name="Google Shape;550;p41"/>
+          <p:cNvPr descr="Small Trees | Free SVG" id="550" name="Google Shape;550;p40"/>
           <p:cNvPicPr preferRelativeResize="0"/>
           <p:nvPr/>
         </p:nvPicPr>
         <p:blipFill rotWithShape="1">
-          <a:blip r:embed="rId7">
+          <a:blip r:embed="rId6">
             <a:alphaModFix/>
           </a:blip>
           <a:srcRect b="0" l="0" r="0" t="0"/>
@@ -44967,12 +45007,12 @@
       </p:pic>
       <p:pic>
         <p:nvPicPr>
-          <p:cNvPr descr="Small Trees | Free SVG" id="551" name="Google Shape;551;p41"/>
+          <p:cNvPr descr="Small Trees | Free SVG" id="551" name="Google Shape;551;p40"/>
           <p:cNvPicPr preferRelativeResize="0"/>
           <p:nvPr/>
         </p:nvPicPr>
         <p:blipFill rotWithShape="1">
-          <a:blip r:embed="rId7">
+          <a:blip r:embed="rId6">
             <a:alphaModFix/>
           </a:blip>
           <a:srcRect b="0" l="0" r="0" t="0"/>
@@ -44980,7 +45020,7 @@
         </p:blipFill>
         <p:spPr>
           <a:xfrm>
-            <a:off x="6435425" y="370575"/>
+            <a:off x="6784500" y="426900"/>
             <a:ext cx="2044399" cy="2044400"/>
           </a:xfrm>
           <a:prstGeom prst="rect">
@@ -45043,7 +45083,7 @@
                                     </p:set>
                                     <p:anim calcmode="lin" valueType="num">
                                       <p:cBhvr additive="base">
-                                        <p:cTn dur="2200"/>
+                                        <p:cTn dur="2100"/>
                                         <p:tgtEl>
                                           <p:spTgt spid="545"/>
                                         </p:tgtEl>
@@ -45369,7 +45409,7 @@
           <a:blip r:embed="rId3">
             <a:alphaModFix/>
           </a:blip>
-          <a:srcRect b="18" l="0" r="0" t="0"/>
+          <a:srcRect b="19" l="0" r="0" t="0"/>
           <a:stretch/>
         </p:blipFill>
         <p:spPr>
